--- a/Technical_Presentation.pptx
+++ b/Technical_Presentation.pptx
@@ -1420,7 +1420,7 @@
           <a:p>
             <a:fld id="{846CE7D5-CF57-46EF-B807-FDD0502418D4}" type="datetimeFigureOut">
               <a:rPr lang="en-US" smtClean="0"/>
-              <a:t>9/7/2026</a:t>
+              <a:t>9/8/2026</a:t>
             </a:fld>
             <a:endParaRPr lang="en-US" dirty="0"/>
           </a:p>
@@ -1590,7 +1590,7 @@
           <a:p>
             <a:fld id="{846CE7D5-CF57-46EF-B807-FDD0502418D4}" type="datetimeFigureOut">
               <a:rPr lang="en-US" smtClean="0"/>
-              <a:t>9/7/2026</a:t>
+              <a:t>9/8/2026</a:t>
             </a:fld>
             <a:endParaRPr lang="en-US" dirty="0"/>
           </a:p>
@@ -1770,7 +1770,7 @@
           <a:p>
             <a:fld id="{846CE7D5-CF57-46EF-B807-FDD0502418D4}" type="datetimeFigureOut">
               <a:rPr lang="en-US" smtClean="0"/>
-              <a:t>9/7/2026</a:t>
+              <a:t>9/8/2026</a:t>
             </a:fld>
             <a:endParaRPr lang="en-US" dirty="0"/>
           </a:p>
@@ -1940,7 +1940,7 @@
           <a:p>
             <a:fld id="{846CE7D5-CF57-46EF-B807-FDD0502418D4}" type="datetimeFigureOut">
               <a:rPr lang="en-US" smtClean="0"/>
-              <a:t>9/7/2026</a:t>
+              <a:t>9/8/2026</a:t>
             </a:fld>
             <a:endParaRPr lang="en-US" dirty="0"/>
           </a:p>
@@ -2186,7 +2186,7 @@
           <a:p>
             <a:fld id="{846CE7D5-CF57-46EF-B807-FDD0502418D4}" type="datetimeFigureOut">
               <a:rPr lang="en-US" smtClean="0"/>
-              <a:t>9/7/2026</a:t>
+              <a:t>9/8/2026</a:t>
             </a:fld>
             <a:endParaRPr lang="en-US" dirty="0"/>
           </a:p>
@@ -2418,7 +2418,7 @@
           <a:p>
             <a:fld id="{846CE7D5-CF57-46EF-B807-FDD0502418D4}" type="datetimeFigureOut">
               <a:rPr lang="en-US" smtClean="0"/>
-              <a:t>9/7/2026</a:t>
+              <a:t>9/8/2026</a:t>
             </a:fld>
             <a:endParaRPr lang="en-US" dirty="0"/>
           </a:p>
@@ -2785,7 +2785,7 @@
           <a:p>
             <a:fld id="{846CE7D5-CF57-46EF-B807-FDD0502418D4}" type="datetimeFigureOut">
               <a:rPr lang="en-US" smtClean="0"/>
-              <a:t>9/7/2026</a:t>
+              <a:t>9/8/2026</a:t>
             </a:fld>
             <a:endParaRPr lang="en-US" dirty="0"/>
           </a:p>
@@ -2903,7 +2903,7 @@
           <a:p>
             <a:fld id="{846CE7D5-CF57-46EF-B807-FDD0502418D4}" type="datetimeFigureOut">
               <a:rPr lang="en-US" smtClean="0"/>
-              <a:t>9/7/2026</a:t>
+              <a:t>9/8/2026</a:t>
             </a:fld>
             <a:endParaRPr lang="en-US" dirty="0"/>
           </a:p>
@@ -2998,7 +2998,7 @@
           <a:p>
             <a:fld id="{846CE7D5-CF57-46EF-B807-FDD0502418D4}" type="datetimeFigureOut">
               <a:rPr lang="en-US" smtClean="0"/>
-              <a:t>9/7/2026</a:t>
+              <a:t>9/8/2026</a:t>
             </a:fld>
             <a:endParaRPr lang="en-US" dirty="0"/>
           </a:p>
@@ -3275,7 +3275,7 @@
           <a:p>
             <a:fld id="{846CE7D5-CF57-46EF-B807-FDD0502418D4}" type="datetimeFigureOut">
               <a:rPr lang="en-US" smtClean="0"/>
-              <a:t>9/7/2026</a:t>
+              <a:t>9/8/2026</a:t>
             </a:fld>
             <a:endParaRPr lang="en-US" dirty="0"/>
           </a:p>
@@ -3528,7 +3528,7 @@
           <a:p>
             <a:fld id="{846CE7D5-CF57-46EF-B807-FDD0502418D4}" type="datetimeFigureOut">
               <a:rPr lang="en-US" smtClean="0"/>
-              <a:t>9/7/2026</a:t>
+              <a:t>9/8/2026</a:t>
             </a:fld>
             <a:endParaRPr lang="en-US" dirty="0"/>
           </a:p>
@@ -3741,7 +3741,7 @@
           <a:p>
             <a:fld id="{846CE7D5-CF57-46EF-B807-FDD0502418D4}" type="datetimeFigureOut">
               <a:rPr lang="en-US" smtClean="0"/>
-              <a:t>9/7/2026</a:t>
+              <a:t>9/8/2026</a:t>
             </a:fld>
             <a:endParaRPr lang="en-US" dirty="0"/>
           </a:p>
@@ -7299,7 +7299,15 @@
           <a:p>
             <a:r>
               <a:rPr lang="en-US" dirty="0"/>
-              <a:t>Customers are equi-valuable, no customer is more valuable than another</a:t>
+              <a:t>Customers </a:t>
+            </a:r>
+            <a:r>
+              <a:rPr lang="en-US"/>
+              <a:t>are equivalent</a:t>
+            </a:r>
+            <a:r>
+              <a:rPr lang="en-US" dirty="0"/>
+              <a:t>, no customer is more valuable than another</a:t>
             </a:r>
           </a:p>
           <a:p>
